--- a/docs/keimyung-proposal/렉처링크_CPX_임상수기센터_협업제안.pptx
+++ b/docs/keimyung-proposal/렉처링크_CPX_임상수기센터_협업제안.pptx
@@ -3439,7 +3439,7 @@
                 </a:solidFill>
                 <a:latin typeface="Apple SD Gothic Neo"/>
               </a:rPr>
-              <a:t>CPX 콘텐츠 의학 검수 · 정식 협약 논의</a:t>
+              <a:t>CPX 콘텐츠 의학 검수 · 공동연구 · 정식 협약 논의</a:t>
             </a:r>
           </a:p>
         </p:txBody>
@@ -8377,7 +8377,7 @@
                 </a:solidFill>
                 <a:latin typeface="Apple SD Gothic Neo"/>
               </a:rPr>
-              <a:t>센터에 남는 것</a:t>
+              <a:t>함께 하고 싶은 연구</a:t>
             </a:r>
           </a:p>
         </p:txBody>
@@ -8412,20 +8412,20 @@
             <a:r>
               <a:rPr sz="5500" b="1">
                 <a:solidFill>
+                  <a:srgbClr val="1B9E3A"/>
+                </a:solidFill>
+                <a:latin typeface="Apple SD Gothic Neo"/>
+              </a:rPr>
+              <a:t>채점 타당도</a:t>
+            </a:r>
+            <a:r>
+              <a:rPr sz="5500" b="1">
+                <a:solidFill>
                   <a:srgbClr val="514149"/>
                 </a:solidFill>
                 <a:latin typeface="Apple SD Gothic Neo"/>
               </a:rPr>
-              <a:t>학생 자율 연습 채널과 </a:t>
-            </a:r>
-            <a:r>
-              <a:rPr sz="5500" b="1">
-                <a:solidFill>
-                  <a:srgbClr val="1B9E3A"/>
-                </a:solidFill>
-                <a:latin typeface="Apple SD Gothic Neo"/>
-              </a:rPr>
-              <a:t>검수된 교육 콘텐츠</a:t>
+              <a:t>를 먼저, 학습 효과는 그다음 — 설계와 일정은 함께 정합니다</a:t>
             </a:r>
           </a:p>
         </p:txBody>
@@ -8438,8 +8438,8 @@
         </p:nvSpPr>
         <p:spPr>
           <a:xfrm>
-            <a:off x="853440" y="4251960"/>
-            <a:ext cx="22677120" cy="8229600"/>
+            <a:off x="975360" y="4389120"/>
+            <a:ext cx="10972800" cy="6309360"/>
           </a:xfrm>
           <a:prstGeom prst="rect">
             <a:avLst/>
@@ -8482,20 +8482,17 @@
         </p:nvSpPr>
         <p:spPr>
           <a:xfrm>
-            <a:off x="1463040" y="4937760"/>
-            <a:ext cx="6705600" cy="6858000"/>
+            <a:off x="975360" y="4389120"/>
+            <a:ext cx="10972800" cy="219456"/>
           </a:xfrm>
           <a:prstGeom prst="rect">
             <a:avLst/>
           </a:prstGeom>
           <a:solidFill>
-            <a:srgbClr val="F1ECE8"/>
+            <a:srgbClr val="1B9E3A"/>
           </a:solidFill>
-          <a:ln w="15240">
-            <a:solidFill>
-              <a:srgbClr val="B9B0AC"/>
-            </a:solidFill>
-            <a:prstDash val="dash"/>
+          <a:ln>
+            <a:noFill/>
           </a:ln>
           <a:effectLst/>
         </p:spPr>
@@ -8529,8 +8526,8 @@
         </p:nvSpPr>
         <p:spPr>
           <a:xfrm>
-            <a:off x="1463040" y="4937760"/>
-            <a:ext cx="6705600" cy="6858000"/>
+            <a:off x="1706880" y="4937760"/>
+            <a:ext cx="9753600" cy="822960"/>
           </a:xfrm>
           <a:prstGeom prst="rect">
             <a:avLst/>
@@ -8538,73 +8535,173 @@
           <a:noFill/>
         </p:spPr>
         <p:txBody>
-          <a:bodyPr wrap="square" anchor="ctr" lIns="0" rIns="0" tIns="0" bIns="0">
+          <a:bodyPr wrap="square" anchor="t" lIns="0" rIns="0" tIns="0" bIns="0">
             <a:spAutoFit/>
           </a:bodyPr>
           <a:lstStyle/>
           <a:p>
-            <a:pPr algn="ctr">
-              <a:lnSpc>
-                <a:spcPct val="140000"/>
-              </a:lnSpc>
-            </a:pPr>
-            <a:r>
-              <a:rPr sz="2200" b="0">
+            <a:pPr algn="l">
+              <a:lnSpc>
+                <a:spcPct val="125000"/>
+              </a:lnSpc>
+            </a:pPr>
+            <a:r>
+              <a:rPr sz="3600" b="1">
+                <a:solidFill>
+                  <a:srgbClr val="2A2A2A"/>
+                </a:solidFill>
+                <a:latin typeface="Apple SD Gothic Neo"/>
+              </a:rPr>
+              <a:t>연구 ①  채점 타당도</a:t>
+            </a:r>
+          </a:p>
+        </p:txBody>
+      </p:sp>
+      <p:sp>
+        <p:nvSpPr>
+          <p:cNvPr id="11" name="TextBox 10"/>
+          <p:cNvSpPr txBox="1"/>
+          <p:nvPr/>
+        </p:nvSpPr>
+        <p:spPr>
+          <a:xfrm>
+            <a:off x="1706880" y="5829300"/>
+            <a:ext cx="9753600" cy="822960"/>
+          </a:xfrm>
+          <a:prstGeom prst="rect">
+            <a:avLst/>
+          </a:prstGeom>
+          <a:noFill/>
+        </p:spPr>
+        <p:txBody>
+          <a:bodyPr wrap="square" anchor="t" lIns="0" rIns="0" tIns="0" bIns="0">
+            <a:spAutoFit/>
+          </a:bodyPr>
+          <a:lstStyle/>
+          <a:p>
+            <a:pPr algn="l">
+              <a:lnSpc>
+                <a:spcPct val="125000"/>
+              </a:lnSpc>
+            </a:pPr>
+            <a:r>
+              <a:rPr sz="2600" b="0">
                 <a:solidFill>
                   <a:srgbClr val="7A7176"/>
                 </a:solidFill>
                 <a:latin typeface="Apple SD Gothic Neo"/>
               </a:rPr>
-              <a:t>아이콘 자리</a:t>
-            </a:r>
-          </a:p>
-          <a:p>
-            <a:pPr algn="ctr">
-              <a:lnSpc>
-                <a:spcPct val="140000"/>
-              </a:lnSpc>
-            </a:pPr>
-          </a:p>
-          <a:p>
-            <a:pPr algn="ctr">
-              <a:lnSpc>
-                <a:spcPct val="140000"/>
-              </a:lnSpc>
-            </a:pPr>
-            <a:r>
-              <a:rPr sz="2200" b="0">
-                <a:solidFill>
-                  <a:srgbClr val="7A7176"/>
-                </a:solidFill>
-                <a:latin typeface="Apple SD Gothic Neo"/>
-              </a:rPr>
-              <a:t>SP·실습실 부하 분산</a:t>
-            </a:r>
-          </a:p>
-        </p:txBody>
-      </p:sp>
-      <p:sp>
-        <p:nvSpPr>
-          <p:cNvPr id="11" name="Rectangle 10"/>
+              <a:t>AI 판정과 전문가 판정은 얼마나, 어디서 갈리는가</a:t>
+            </a:r>
+          </a:p>
+        </p:txBody>
+      </p:sp>
+      <p:sp>
+        <p:nvSpPr>
+          <p:cNvPr id="12" name="TextBox 11"/>
+          <p:cNvSpPr txBox="1"/>
+          <p:nvPr/>
+        </p:nvSpPr>
+        <p:spPr>
+          <a:xfrm>
+            <a:off x="1706880" y="6858000"/>
+            <a:ext cx="9753600" cy="4389120"/>
+          </a:xfrm>
+          <a:prstGeom prst="rect">
+            <a:avLst/>
+          </a:prstGeom>
+          <a:noFill/>
+        </p:spPr>
+        <p:txBody>
+          <a:bodyPr wrap="square" anchor="t" lIns="0" rIns="0" tIns="0" bIns="0">
+            <a:spAutoFit/>
+          </a:bodyPr>
+          <a:lstStyle/>
+          <a:p>
+            <a:pPr algn="l">
+              <a:lnSpc>
+                <a:spcPct val="145000"/>
+              </a:lnSpc>
+            </a:pPr>
+            <a:r>
+              <a:rPr sz="2800" b="0">
+                <a:solidFill>
+                  <a:srgbClr val="514149"/>
+                </a:solidFill>
+                <a:latin typeface="Apple SD Gothic Neo"/>
+              </a:rPr>
+              <a:t>▷ 일치도는 어느 수준인가</a:t>
+            </a:r>
+          </a:p>
+          <a:p>
+            <a:pPr algn="l">
+              <a:lnSpc>
+                <a:spcPct val="145000"/>
+              </a:lnSpc>
+            </a:pPr>
+            <a:r>
+              <a:rPr sz="2800" b="0">
+                <a:solidFill>
+                  <a:srgbClr val="514149"/>
+                </a:solidFill>
+                <a:latin typeface="Apple SD Gothic Neo"/>
+              </a:rPr>
+              <a:t>▷ 불일치는 어떤 항목에 몰리는가</a:t>
+            </a:r>
+          </a:p>
+          <a:p>
+            <a:pPr algn="l">
+              <a:lnSpc>
+                <a:spcPct val="145000"/>
+              </a:lnSpc>
+            </a:pPr>
+            <a:r>
+              <a:rPr sz="2800" b="0">
+                <a:solidFill>
+                  <a:srgbClr val="514149"/>
+                </a:solidFill>
+                <a:latin typeface="Apple SD Gothic Neo"/>
+              </a:rPr>
+              <a:t>▷ 인용한 대화 근거가 실제와 맞는가</a:t>
+            </a:r>
+          </a:p>
+          <a:p>
+            <a:pPr algn="l">
+              <a:lnSpc>
+                <a:spcPct val="145000"/>
+              </a:lnSpc>
+            </a:pPr>
+            <a:r>
+              <a:rPr sz="2800" b="0">
+                <a:solidFill>
+                  <a:srgbClr val="514149"/>
+                </a:solidFill>
+                <a:latin typeface="Apple SD Gothic Neo"/>
+              </a:rPr>
+              <a:t>▷ 재채점해도 같은 결과가 나오는가</a:t>
+            </a:r>
+          </a:p>
+        </p:txBody>
+      </p:sp>
+      <p:sp>
+        <p:nvSpPr>
+          <p:cNvPr id="13" name="Rectangle 12"/>
           <p:cNvSpPr/>
           <p:nvPr/>
         </p:nvSpPr>
         <p:spPr>
           <a:xfrm>
-            <a:off x="8778240" y="4937760"/>
-            <a:ext cx="6705600" cy="6858000"/>
+            <a:off x="12435840" y="4389120"/>
+            <a:ext cx="10972800" cy="6309360"/>
           </a:xfrm>
           <a:prstGeom prst="rect">
             <a:avLst/>
           </a:prstGeom>
           <a:solidFill>
-            <a:srgbClr val="F1ECE8"/>
+            <a:srgbClr val="FFFFFF"/>
           </a:solidFill>
-          <a:ln w="15240">
-            <a:solidFill>
-              <a:srgbClr val="B9B0AC"/>
-            </a:solidFill>
-            <a:prstDash val="dash"/>
+          <a:ln>
+            <a:noFill/>
           </a:ln>
           <a:effectLst/>
         </p:spPr>
@@ -8632,104 +8729,23 @@
       </p:sp>
       <p:sp>
         <p:nvSpPr>
-          <p:cNvPr id="12" name="TextBox 11"/>
-          <p:cNvSpPr txBox="1"/>
-          <p:nvPr/>
-        </p:nvSpPr>
-        <p:spPr>
-          <a:xfrm>
-            <a:off x="8778240" y="4937760"/>
-            <a:ext cx="6705600" cy="6858000"/>
-          </a:xfrm>
-          <a:prstGeom prst="rect">
-            <a:avLst/>
-          </a:prstGeom>
-          <a:noFill/>
-        </p:spPr>
-        <p:txBody>
-          <a:bodyPr wrap="square" anchor="ctr" lIns="0" rIns="0" tIns="0" bIns="0">
-            <a:spAutoFit/>
-          </a:bodyPr>
-          <a:lstStyle/>
-          <a:p>
-            <a:pPr algn="ctr">
-              <a:lnSpc>
-                <a:spcPct val="140000"/>
-              </a:lnSpc>
-            </a:pPr>
-            <a:r>
-              <a:rPr sz="2200" b="0">
-                <a:solidFill>
-                  <a:srgbClr val="7A7176"/>
-                </a:solidFill>
-                <a:latin typeface="Apple SD Gothic Neo"/>
-              </a:rPr>
-              <a:t>아이콘 자리</a:t>
-            </a:r>
-          </a:p>
-          <a:p>
-            <a:pPr algn="ctr">
-              <a:lnSpc>
-                <a:spcPct val="140000"/>
-              </a:lnSpc>
-            </a:pPr>
-          </a:p>
-          <a:p>
-            <a:pPr algn="ctr">
-              <a:lnSpc>
-                <a:spcPct val="140000"/>
-              </a:lnSpc>
-            </a:pPr>
-            <a:r>
-              <a:rPr sz="2200" b="0">
-                <a:solidFill>
-                  <a:srgbClr val="7A7176"/>
-                </a:solidFill>
-                <a:latin typeface="Apple SD Gothic Neo"/>
-              </a:rPr>
-              <a:t>학생 연습 기록</a:t>
-            </a:r>
-          </a:p>
-          <a:p>
-            <a:pPr algn="ctr">
-              <a:lnSpc>
-                <a:spcPct val="140000"/>
-              </a:lnSpc>
-            </a:pPr>
-            <a:r>
-              <a:rPr sz="2200" b="0">
-                <a:solidFill>
-                  <a:srgbClr val="7A7176"/>
-                </a:solidFill>
-                <a:latin typeface="Apple SD Gothic Neo"/>
-              </a:rPr>
-              <a:t>→ 실습 전 진단</a:t>
-            </a:r>
-          </a:p>
-        </p:txBody>
-      </p:sp>
-      <p:sp>
-        <p:nvSpPr>
-          <p:cNvPr id="13" name="Rectangle 12"/>
+          <p:cNvPr id="14" name="Rectangle 13"/>
           <p:cNvSpPr/>
           <p:nvPr/>
         </p:nvSpPr>
         <p:spPr>
           <a:xfrm>
-            <a:off x="16093440" y="4937760"/>
-            <a:ext cx="6705600" cy="6858000"/>
+            <a:off x="12435840" y="4389120"/>
+            <a:ext cx="10972800" cy="219456"/>
           </a:xfrm>
           <a:prstGeom prst="rect">
             <a:avLst/>
           </a:prstGeom>
           <a:solidFill>
-            <a:srgbClr val="F1ECE8"/>
+            <a:srgbClr val="B5EFC6"/>
           </a:solidFill>
-          <a:ln w="15240">
-            <a:solidFill>
-              <a:srgbClr val="B9B0AC"/>
-            </a:solidFill>
-            <a:prstDash val="dash"/>
+          <a:ln>
+            <a:noFill/>
           </a:ln>
           <a:effectLst/>
         </p:spPr>
@@ -8757,14 +8773,179 @@
       </p:sp>
       <p:sp>
         <p:nvSpPr>
-          <p:cNvPr id="14" name="TextBox 13"/>
+          <p:cNvPr id="15" name="TextBox 14"/>
           <p:cNvSpPr txBox="1"/>
           <p:nvPr/>
         </p:nvSpPr>
         <p:spPr>
           <a:xfrm>
-            <a:off x="16093440" y="4937760"/>
-            <a:ext cx="6705600" cy="6858000"/>
+            <a:off x="13167360" y="4937760"/>
+            <a:ext cx="9753600" cy="822960"/>
+          </a:xfrm>
+          <a:prstGeom prst="rect">
+            <a:avLst/>
+          </a:prstGeom>
+          <a:noFill/>
+        </p:spPr>
+        <p:txBody>
+          <a:bodyPr wrap="square" anchor="t" lIns="0" rIns="0" tIns="0" bIns="0">
+            <a:spAutoFit/>
+          </a:bodyPr>
+          <a:lstStyle/>
+          <a:p>
+            <a:pPr algn="l">
+              <a:lnSpc>
+                <a:spcPct val="125000"/>
+              </a:lnSpc>
+            </a:pPr>
+            <a:r>
+              <a:rPr sz="3600" b="1">
+                <a:solidFill>
+                  <a:srgbClr val="2A2A2A"/>
+                </a:solidFill>
+                <a:latin typeface="Apple SD Gothic Neo"/>
+              </a:rPr>
+              <a:t>연구 ②  학습 효과</a:t>
+            </a:r>
+          </a:p>
+        </p:txBody>
+      </p:sp>
+      <p:sp>
+        <p:nvSpPr>
+          <p:cNvPr id="16" name="TextBox 15"/>
+          <p:cNvSpPr txBox="1"/>
+          <p:nvPr/>
+        </p:nvSpPr>
+        <p:spPr>
+          <a:xfrm>
+            <a:off x="13167360" y="5829300"/>
+            <a:ext cx="9753600" cy="822960"/>
+          </a:xfrm>
+          <a:prstGeom prst="rect">
+            <a:avLst/>
+          </a:prstGeom>
+          <a:noFill/>
+        </p:spPr>
+        <p:txBody>
+          <a:bodyPr wrap="square" anchor="t" lIns="0" rIns="0" tIns="0" bIns="0">
+            <a:spAutoFit/>
+          </a:bodyPr>
+          <a:lstStyle/>
+          <a:p>
+            <a:pPr algn="l">
+              <a:lnSpc>
+                <a:spcPct val="125000"/>
+              </a:lnSpc>
+            </a:pPr>
+            <a:r>
+              <a:rPr sz="2600" b="0">
+                <a:solidFill>
+                  <a:srgbClr val="7A7176"/>
+                </a:solidFill>
+                <a:latin typeface="Apple SD Gothic Neo"/>
+              </a:rPr>
+              <a:t>플랫폼 밖의 준거로 확인하는 학습 효과</a:t>
+            </a:r>
+          </a:p>
+        </p:txBody>
+      </p:sp>
+      <p:sp>
+        <p:nvSpPr>
+          <p:cNvPr id="17" name="TextBox 16"/>
+          <p:cNvSpPr txBox="1"/>
+          <p:nvPr/>
+        </p:nvSpPr>
+        <p:spPr>
+          <a:xfrm>
+            <a:off x="13167360" y="6858000"/>
+            <a:ext cx="9753600" cy="4389120"/>
+          </a:xfrm>
+          <a:prstGeom prst="rect">
+            <a:avLst/>
+          </a:prstGeom>
+          <a:noFill/>
+        </p:spPr>
+        <p:txBody>
+          <a:bodyPr wrap="square" anchor="t" lIns="0" rIns="0" tIns="0" bIns="0">
+            <a:spAutoFit/>
+          </a:bodyPr>
+          <a:lstStyle/>
+          <a:p>
+            <a:pPr algn="l">
+              <a:lnSpc>
+                <a:spcPct val="145000"/>
+              </a:lnSpc>
+            </a:pPr>
+            <a:r>
+              <a:rPr sz="2800" b="0">
+                <a:solidFill>
+                  <a:srgbClr val="514149"/>
+                </a:solidFill>
+                <a:latin typeface="Apple SD Gothic Neo"/>
+              </a:rPr>
+              <a:t>▷ 실습 평가 등 외부 준거로 향상되는가</a:t>
+            </a:r>
+          </a:p>
+          <a:p>
+            <a:pPr algn="l">
+              <a:lnSpc>
+                <a:spcPct val="145000"/>
+              </a:lnSpc>
+            </a:pPr>
+            <a:r>
+              <a:rPr sz="2800" b="0">
+                <a:solidFill>
+                  <a:srgbClr val="514149"/>
+                </a:solidFill>
+                <a:latin typeface="Apple SD Gothic Neo"/>
+              </a:rPr>
+              <a:t>▷ 피드백 방식에 따라 달라지는가</a:t>
+            </a:r>
+          </a:p>
+          <a:p>
+            <a:pPr algn="l">
+              <a:lnSpc>
+                <a:spcPct val="145000"/>
+              </a:lnSpc>
+            </a:pPr>
+            <a:r>
+              <a:rPr sz="2800" b="0">
+                <a:solidFill>
+                  <a:srgbClr val="514149"/>
+                </a:solidFill>
+                <a:latin typeface="Apple SD Gothic Neo"/>
+              </a:rPr>
+              <a:t>▷ 같은 증례 반복과 변형 중 무엇이 낫는가</a:t>
+            </a:r>
+          </a:p>
+          <a:p>
+            <a:pPr algn="l">
+              <a:lnSpc>
+                <a:spcPct val="145000"/>
+              </a:lnSpc>
+            </a:pPr>
+            <a:r>
+              <a:rPr sz="2800" b="0">
+                <a:solidFill>
+                  <a:srgbClr val="514149"/>
+                </a:solidFill>
+                <a:latin typeface="Apple SD Gothic Neo"/>
+              </a:rPr>
+              <a:t>▷ 실습 과정에 통합할 수 있는가</a:t>
+            </a:r>
+          </a:p>
+        </p:txBody>
+      </p:sp>
+      <p:sp>
+        <p:nvSpPr>
+          <p:cNvPr id="18" name="TextBox 17"/>
+          <p:cNvSpPr txBox="1"/>
+          <p:nvPr/>
+        </p:nvSpPr>
+        <p:spPr>
+          <a:xfrm>
+            <a:off x="975360" y="11384280"/>
+            <a:ext cx="22433280" cy="1097280"/>
           </a:xfrm>
           <a:prstGeom prst="rect">
             <a:avLst/>
@@ -8779,56 +8960,26 @@
           <a:p>
             <a:pPr algn="ctr">
               <a:lnSpc>
-                <a:spcPct val="140000"/>
-              </a:lnSpc>
-            </a:pPr>
-            <a:r>
-              <a:rPr sz="2200" b="0">
-                <a:solidFill>
-                  <a:srgbClr val="7A7176"/>
-                </a:solidFill>
-                <a:latin typeface="Apple SD Gothic Neo"/>
-              </a:rPr>
-              <a:t>아이콘 자리</a:t>
-            </a:r>
-          </a:p>
-          <a:p>
-            <a:pPr algn="ctr">
-              <a:lnSpc>
-                <a:spcPct val="140000"/>
-              </a:lnSpc>
-            </a:pPr>
-          </a:p>
-          <a:p>
-            <a:pPr algn="ctr">
-              <a:lnSpc>
-                <a:spcPct val="140000"/>
-              </a:lnSpc>
-            </a:pPr>
-            <a:r>
-              <a:rPr sz="2200" b="0">
-                <a:solidFill>
-                  <a:srgbClr val="7A7176"/>
-                </a:solidFill>
-                <a:latin typeface="Apple SD Gothic Neo"/>
-              </a:rPr>
-              <a:t>센터 검수 명기</a:t>
-            </a:r>
-          </a:p>
-          <a:p>
-            <a:pPr algn="ctr">
-              <a:lnSpc>
-                <a:spcPct val="140000"/>
-              </a:lnSpc>
-            </a:pPr>
-            <a:r>
-              <a:rPr sz="2200" b="0">
-                <a:solidFill>
-                  <a:srgbClr val="7A7176"/>
-                </a:solidFill>
-                <a:latin typeface="Apple SD Gothic Neo"/>
-              </a:rPr>
-              <a:t>공동 성과</a:t>
+                <a:spcPct val="125000"/>
+              </a:lnSpc>
+            </a:pPr>
+            <a:r>
+              <a:rPr sz="2600" b="1">
+                <a:solidFill>
+                  <a:srgbClr val="2A2A2A"/>
+                </a:solidFill>
+                <a:latin typeface="Apple SD Gothic Neo"/>
+              </a:rPr>
+              <a:t>저희가 먼저 약속하는 것  </a:t>
+            </a:r>
+            <a:r>
+              <a:rPr sz="2600" b="0">
+                <a:solidFill>
+                  <a:srgbClr val="514149"/>
+                </a:solidFill>
+                <a:latin typeface="Apple SD Gothic Neo"/>
+              </a:rPr>
+              <a:t>부정적 결과도 발표에 동의 · 데이터와 분석 코드 공개 · 분석 계획 사전 등록</a:t>
             </a:r>
           </a:p>
         </p:txBody>

--- a/docs/keimyung-proposal/렉처링크_CPX_임상수기센터_협업제안.pptx
+++ b/docs/keimyung-proposal/렉처링크_CPX_임상수기센터_협업제안.pptx
@@ -7525,8 +7525,8 @@
         </p:nvSpPr>
         <p:spPr>
           <a:xfrm>
-            <a:off x="975360" y="4937760"/>
-            <a:ext cx="7315200" cy="6035040"/>
+            <a:off x="975360" y="4526280"/>
+            <a:ext cx="5364480" cy="5486400"/>
           </a:xfrm>
           <a:prstGeom prst="rect">
             <a:avLst/>
@@ -7569,8 +7569,8 @@
         </p:nvSpPr>
         <p:spPr>
           <a:xfrm>
-            <a:off x="975360" y="4937760"/>
-            <a:ext cx="7315200" cy="219456"/>
+            <a:off x="975360" y="4526280"/>
+            <a:ext cx="5364480" cy="219456"/>
           </a:xfrm>
           <a:prstGeom prst="rect">
             <a:avLst/>
@@ -7613,8 +7613,8 @@
         </p:nvSpPr>
         <p:spPr>
           <a:xfrm>
-            <a:off x="1584960" y="5623560"/>
-            <a:ext cx="6096000" cy="685800"/>
+            <a:off x="1463040" y="5074920"/>
+            <a:ext cx="4632960" cy="685800"/>
           </a:xfrm>
           <a:prstGeom prst="rect">
             <a:avLst/>
@@ -7633,13 +7633,13 @@
               </a:lnSpc>
             </a:pPr>
             <a:r>
-              <a:rPr sz="2400" b="0">
+              <a:rPr sz="2200" b="0">
                 <a:solidFill>
                   <a:srgbClr val="7A7176"/>
                 </a:solidFill>
                 <a:latin typeface="Apple SD Gothic Neo"/>
               </a:rPr>
-              <a:t>1단계 · 2주</a:t>
+              <a:t>C1 · 최우선</a:t>
             </a:r>
           </a:p>
         </p:txBody>
@@ -7652,8 +7652,8 @@
         </p:nvSpPr>
         <p:spPr>
           <a:xfrm>
-            <a:off x="1584960" y="6446520"/>
-            <a:ext cx="6096000" cy="1371600"/>
+            <a:off x="1463040" y="5829300"/>
+            <a:ext cx="4632960" cy="1645920"/>
           </a:xfrm>
           <a:prstGeom prst="rect">
             <a:avLst/>
@@ -7672,13 +7672,13 @@
               </a:lnSpc>
             </a:pPr>
             <a:r>
-              <a:rPr sz="4000" b="1">
+              <a:rPr sz="3200" b="1">
                 <a:solidFill>
                   <a:srgbClr val="2A2A2A"/>
                 </a:solidFill>
                 <a:latin typeface="Apple SD Gothic Neo"/>
               </a:rPr>
-              <a:t>채점표 정본 대조</a:t>
+              <a:t>채점표 대조</a:t>
             </a:r>
           </a:p>
         </p:txBody>
@@ -7691,8 +7691,8 @@
         </p:nvSpPr>
         <p:spPr>
           <a:xfrm>
-            <a:off x="1584960" y="8229600"/>
-            <a:ext cx="6096000" cy="2468880"/>
+            <a:off x="1463040" y="7680960"/>
+            <a:ext cx="4632960" cy="2194560"/>
           </a:xfrm>
           <a:prstGeom prst="rect">
             <a:avLst/>
@@ -7711,13 +7711,13 @@
               </a:lnSpc>
             </a:pPr>
             <a:r>
-              <a:rPr sz="2800" b="0">
+              <a:rPr sz="2400" b="0">
                 <a:solidFill>
                   <a:srgbClr val="514149"/>
                 </a:solidFill>
                 <a:latin typeface="Apple SD Gothic Neo"/>
               </a:rPr>
-              <a:t>센터 채점표 1~2종과</a:t>
+              <a:t>자체 채점표 54종을</a:t>
             </a:r>
           </a:p>
           <a:p>
@@ -7727,13 +7727,13 @@
               </a:lnSpc>
             </a:pPr>
             <a:r>
-              <a:rPr sz="2800" b="0">
+              <a:rPr sz="2400" b="0">
                 <a:solidFill>
                   <a:srgbClr val="514149"/>
                 </a:solidFill>
                 <a:latin typeface="Apple SD Gothic Neo"/>
               </a:rPr>
-              <a:t>항목 단위 비교</a:t>
+              <a:t>센터 채점 원칙과</a:t>
             </a:r>
           </a:p>
         </p:txBody>
@@ -7746,8 +7746,8 @@
         </p:nvSpPr>
         <p:spPr>
           <a:xfrm>
-            <a:off x="8534400" y="4937760"/>
-            <a:ext cx="7315200" cy="6035040"/>
+            <a:off x="6644640" y="4526280"/>
+            <a:ext cx="5364480" cy="5486400"/>
           </a:xfrm>
           <a:prstGeom prst="rect">
             <a:avLst/>
@@ -7790,14 +7790,14 @@
         </p:nvSpPr>
         <p:spPr>
           <a:xfrm>
-            <a:off x="8534400" y="4937760"/>
-            <a:ext cx="7315200" cy="219456"/>
+            <a:off x="6644640" y="4526280"/>
+            <a:ext cx="5364480" cy="219456"/>
           </a:xfrm>
           <a:prstGeom prst="rect">
             <a:avLst/>
           </a:prstGeom>
           <a:solidFill>
-            <a:srgbClr val="B5EFC6"/>
+            <a:srgbClr val="1B9E3A"/>
           </a:solidFill>
           <a:ln>
             <a:noFill/>
@@ -7834,8 +7834,8 @@
         </p:nvSpPr>
         <p:spPr>
           <a:xfrm>
-            <a:off x="9144000" y="5623560"/>
-            <a:ext cx="6096000" cy="685800"/>
+            <a:off x="7132320" y="5074920"/>
+            <a:ext cx="4632960" cy="685800"/>
           </a:xfrm>
           <a:prstGeom prst="rect">
             <a:avLst/>
@@ -7854,13 +7854,13 @@
               </a:lnSpc>
             </a:pPr>
             <a:r>
-              <a:rPr sz="2400" b="0">
+              <a:rPr sz="2200" b="0">
                 <a:solidFill>
                   <a:srgbClr val="7A7176"/>
                 </a:solidFill>
                 <a:latin typeface="Apple SD Gothic Neo"/>
               </a:rPr>
-              <a:t>2단계 · 4주</a:t>
+              <a:t>C2 · 최우선</a:t>
             </a:r>
           </a:p>
         </p:txBody>
@@ -7873,8 +7873,8 @@
         </p:nvSpPr>
         <p:spPr>
           <a:xfrm>
-            <a:off x="9144000" y="6446520"/>
-            <a:ext cx="6096000" cy="1371600"/>
+            <a:off x="7132320" y="5829300"/>
+            <a:ext cx="4632960" cy="1645920"/>
           </a:xfrm>
           <a:prstGeom prst="rect">
             <a:avLst/>
@@ -7893,13 +7893,13 @@
               </a:lnSpc>
             </a:pPr>
             <a:r>
-              <a:rPr sz="4000" b="1">
+              <a:rPr sz="3200" b="1">
                 <a:solidFill>
                   <a:srgbClr val="2A2A2A"/>
                 </a:solidFill>
                 <a:latin typeface="Apple SD Gothic Neo"/>
               </a:rPr>
-              <a:t>증례 블라인드 검수</a:t>
+              <a:t>증례 정확도</a:t>
             </a:r>
           </a:p>
         </p:txBody>
@@ -7912,8 +7912,8 @@
         </p:nvSpPr>
         <p:spPr>
           <a:xfrm>
-            <a:off x="9144000" y="8229600"/>
-            <a:ext cx="6096000" cy="2468880"/>
+            <a:off x="7132320" y="7680960"/>
+            <a:ext cx="4632960" cy="2194560"/>
           </a:xfrm>
           <a:prstGeom prst="rect">
             <a:avLst/>
@@ -7932,13 +7932,13 @@
               </a:lnSpc>
             </a:pPr>
             <a:r>
-              <a:rPr sz="2800" b="0">
+              <a:rPr sz="2400" b="0">
                 <a:solidFill>
                   <a:srgbClr val="514149"/>
                 </a:solidFill>
                 <a:latin typeface="Apple SD Gothic Neo"/>
               </a:rPr>
-              <a:t>층화 추출 표본,</a:t>
+              <a:t>표본 20~30개의</a:t>
             </a:r>
           </a:p>
           <a:p>
@@ -7948,13 +7948,13 @@
               </a:lnSpc>
             </a:pPr>
             <a:r>
-              <a:rPr sz="2800" b="0">
+              <a:rPr sz="2400" b="0">
                 <a:solidFill>
                   <a:srgbClr val="514149"/>
                 </a:solidFill>
                 <a:latin typeface="Apple SD Gothic Neo"/>
               </a:rPr>
-              <a:t>검수 화면 제공</a:t>
+              <a:t>병력·소견·감별</a:t>
             </a:r>
           </a:p>
         </p:txBody>
@@ -7967,8 +7967,8 @@
         </p:nvSpPr>
         <p:spPr>
           <a:xfrm>
-            <a:off x="16093440" y="4937760"/>
-            <a:ext cx="7315200" cy="6035040"/>
+            <a:off x="12313920" y="4526280"/>
+            <a:ext cx="5364480" cy="5486400"/>
           </a:xfrm>
           <a:prstGeom prst="rect">
             <a:avLst/>
@@ -8011,14 +8011,14 @@
         </p:nvSpPr>
         <p:spPr>
           <a:xfrm>
-            <a:off x="16093440" y="4937760"/>
-            <a:ext cx="7315200" cy="219456"/>
+            <a:off x="12313920" y="4526280"/>
+            <a:ext cx="5364480" cy="219456"/>
           </a:xfrm>
           <a:prstGeom prst="rect">
             <a:avLst/>
           </a:prstGeom>
           <a:solidFill>
-            <a:srgbClr val="B5EFC6"/>
+            <a:srgbClr val="1B9E3A"/>
           </a:solidFill>
           <a:ln>
             <a:noFill/>
@@ -8055,8 +8055,8 @@
         </p:nvSpPr>
         <p:spPr>
           <a:xfrm>
-            <a:off x="16703040" y="5623560"/>
-            <a:ext cx="6096000" cy="685800"/>
+            <a:off x="12801600" y="5074920"/>
+            <a:ext cx="4632960" cy="685800"/>
           </a:xfrm>
           <a:prstGeom prst="rect">
             <a:avLst/>
@@ -8075,13 +8075,13 @@
               </a:lnSpc>
             </a:pPr>
             <a:r>
-              <a:rPr sz="2400" b="0">
+              <a:rPr sz="2200" b="0">
                 <a:solidFill>
                   <a:srgbClr val="7A7176"/>
                 </a:solidFill>
                 <a:latin typeface="Apple SD Gothic Neo"/>
               </a:rPr>
-              <a:t>3단계 · 6주</a:t>
+              <a:t>C3 · 최우선</a:t>
             </a:r>
           </a:p>
         </p:txBody>
@@ -8094,8 +8094,8 @@
         </p:nvSpPr>
         <p:spPr>
           <a:xfrm>
-            <a:off x="16703040" y="6446520"/>
-            <a:ext cx="6096000" cy="1371600"/>
+            <a:off x="12801600" y="5829300"/>
+            <a:ext cx="4632960" cy="1645920"/>
           </a:xfrm>
           <a:prstGeom prst="rect">
             <a:avLst/>
@@ -8114,13 +8114,13 @@
               </a:lnSpc>
             </a:pPr>
             <a:r>
-              <a:rPr sz="4000" b="1">
+              <a:rPr sz="3200" b="1">
                 <a:solidFill>
                   <a:srgbClr val="2A2A2A"/>
                 </a:solidFill>
                 <a:latin typeface="Apple SD Gothic Neo"/>
               </a:rPr>
-              <a:t>학생 파일럿</a:t>
+              <a:t>환자 정보 공개 규칙</a:t>
             </a:r>
           </a:p>
         </p:txBody>
@@ -8133,8 +8133,8 @@
         </p:nvSpPr>
         <p:spPr>
           <a:xfrm>
-            <a:off x="16703040" y="8229600"/>
-            <a:ext cx="6096000" cy="2468880"/>
+            <a:off x="12801600" y="7680960"/>
+            <a:ext cx="4632960" cy="2194560"/>
           </a:xfrm>
           <a:prstGeom prst="rect">
             <a:avLst/>
@@ -8153,13 +8153,13 @@
               </a:lnSpc>
             </a:pPr>
             <a:r>
-              <a:rPr sz="2800" b="0">
+              <a:rPr sz="2400" b="0">
                 <a:solidFill>
                   <a:srgbClr val="514149"/>
                 </a:solidFill>
                 <a:latin typeface="Apple SD Gothic Neo"/>
               </a:rPr>
-              <a:t>센터 실습과 병행,</a:t>
+              <a:t>무엇을 먼저, 무엇은</a:t>
             </a:r>
           </a:p>
           <a:p>
@@ -8169,13 +8169,321 @@
               </a:lnSpc>
             </a:pPr>
             <a:r>
-              <a:rPr sz="2800" b="0">
+              <a:rPr sz="2400" b="0">
                 <a:solidFill>
                   <a:srgbClr val="514149"/>
                 </a:solidFill>
                 <a:latin typeface="Apple SD Gothic Neo"/>
               </a:rPr>
-              <a:t>결과 공동 분석</a:t>
+              <a:t>물어야, 무엇은 끝까지</a:t>
+            </a:r>
+          </a:p>
+        </p:txBody>
+      </p:sp>
+      <p:sp>
+        <p:nvSpPr>
+          <p:cNvPr id="23" name="Rectangle 22"/>
+          <p:cNvSpPr/>
+          <p:nvPr/>
+        </p:nvSpPr>
+        <p:spPr>
+          <a:xfrm>
+            <a:off x="17983200" y="4526280"/>
+            <a:ext cx="5364480" cy="5486400"/>
+          </a:xfrm>
+          <a:prstGeom prst="rect">
+            <a:avLst/>
+          </a:prstGeom>
+          <a:solidFill>
+            <a:srgbClr val="FFFFFF"/>
+          </a:solidFill>
+          <a:ln>
+            <a:noFill/>
+          </a:ln>
+          <a:effectLst/>
+        </p:spPr>
+        <p:style>
+          <a:lnRef idx="1">
+            <a:schemeClr val="accent1"/>
+          </a:lnRef>
+          <a:fillRef idx="3">
+            <a:schemeClr val="accent1"/>
+          </a:fillRef>
+          <a:effectRef idx="2">
+            <a:schemeClr val="accent1"/>
+          </a:effectRef>
+          <a:fontRef idx="minor">
+            <a:schemeClr val="lt1"/>
+          </a:fontRef>
+        </p:style>
+        <p:txBody>
+          <a:bodyPr rtlCol="0" anchor="ctr"/>
+          <a:lstStyle/>
+          <a:p>
+            <a:pPr algn="ctr"/>
+          </a:p>
+        </p:txBody>
+      </p:sp>
+      <p:sp>
+        <p:nvSpPr>
+          <p:cNvPr id="24" name="Rectangle 23"/>
+          <p:cNvSpPr/>
+          <p:nvPr/>
+        </p:nvSpPr>
+        <p:spPr>
+          <a:xfrm>
+            <a:off x="17983200" y="4526280"/>
+            <a:ext cx="5364480" cy="219456"/>
+          </a:xfrm>
+          <a:prstGeom prst="rect">
+            <a:avLst/>
+          </a:prstGeom>
+          <a:solidFill>
+            <a:srgbClr val="1B9E3A"/>
+          </a:solidFill>
+          <a:ln>
+            <a:noFill/>
+          </a:ln>
+          <a:effectLst/>
+        </p:spPr>
+        <p:style>
+          <a:lnRef idx="1">
+            <a:schemeClr val="accent1"/>
+          </a:lnRef>
+          <a:fillRef idx="3">
+            <a:schemeClr val="accent1"/>
+          </a:fillRef>
+          <a:effectRef idx="2">
+            <a:schemeClr val="accent1"/>
+          </a:effectRef>
+          <a:fontRef idx="minor">
+            <a:schemeClr val="lt1"/>
+          </a:fontRef>
+        </p:style>
+        <p:txBody>
+          <a:bodyPr rtlCol="0" anchor="ctr"/>
+          <a:lstStyle/>
+          <a:p>
+            <a:pPr algn="ctr"/>
+          </a:p>
+        </p:txBody>
+      </p:sp>
+      <p:sp>
+        <p:nvSpPr>
+          <p:cNvPr id="25" name="TextBox 24"/>
+          <p:cNvSpPr txBox="1"/>
+          <p:nvPr/>
+        </p:nvSpPr>
+        <p:spPr>
+          <a:xfrm>
+            <a:off x="18470880" y="5074920"/>
+            <a:ext cx="4632960" cy="685800"/>
+          </a:xfrm>
+          <a:prstGeom prst="rect">
+            <a:avLst/>
+          </a:prstGeom>
+          <a:noFill/>
+        </p:spPr>
+        <p:txBody>
+          <a:bodyPr wrap="square" anchor="t" lIns="0" rIns="0" tIns="0" bIns="0">
+            <a:spAutoFit/>
+          </a:bodyPr>
+          <a:lstStyle/>
+          <a:p>
+            <a:pPr algn="l">
+              <a:lnSpc>
+                <a:spcPct val="125000"/>
+              </a:lnSpc>
+            </a:pPr>
+            <a:r>
+              <a:rPr sz="2200" b="0">
+                <a:solidFill>
+                  <a:srgbClr val="7A7176"/>
+                </a:solidFill>
+                <a:latin typeface="Apple SD Gothic Neo"/>
+              </a:rPr>
+              <a:t>C4 · 최우선</a:t>
+            </a:r>
+          </a:p>
+        </p:txBody>
+      </p:sp>
+      <p:sp>
+        <p:nvSpPr>
+          <p:cNvPr id="26" name="TextBox 25"/>
+          <p:cNvSpPr txBox="1"/>
+          <p:nvPr/>
+        </p:nvSpPr>
+        <p:spPr>
+          <a:xfrm>
+            <a:off x="18470880" y="5829300"/>
+            <a:ext cx="4632960" cy="1645920"/>
+          </a:xfrm>
+          <a:prstGeom prst="rect">
+            <a:avLst/>
+          </a:prstGeom>
+          <a:noFill/>
+        </p:spPr>
+        <p:txBody>
+          <a:bodyPr wrap="square" anchor="t" lIns="0" rIns="0" tIns="0" bIns="0">
+            <a:spAutoFit/>
+          </a:bodyPr>
+          <a:lstStyle/>
+          <a:p>
+            <a:pPr algn="l">
+              <a:lnSpc>
+                <a:spcPct val="120000"/>
+              </a:lnSpc>
+            </a:pPr>
+            <a:r>
+              <a:rPr sz="3200" b="1">
+                <a:solidFill>
+                  <a:srgbClr val="2A2A2A"/>
+                </a:solidFill>
+                <a:latin typeface="Apple SD Gothic Neo"/>
+              </a:rPr>
+              <a:t>실제 시험 구현성</a:t>
+            </a:r>
+          </a:p>
+        </p:txBody>
+      </p:sp>
+      <p:sp>
+        <p:nvSpPr>
+          <p:cNvPr id="27" name="TextBox 26"/>
+          <p:cNvSpPr txBox="1"/>
+          <p:nvPr/>
+        </p:nvSpPr>
+        <p:spPr>
+          <a:xfrm>
+            <a:off x="18470880" y="7680960"/>
+            <a:ext cx="4632960" cy="2194560"/>
+          </a:xfrm>
+          <a:prstGeom prst="rect">
+            <a:avLst/>
+          </a:prstGeom>
+          <a:noFill/>
+        </p:spPr>
+        <p:txBody>
+          <a:bodyPr wrap="square" anchor="t" lIns="0" rIns="0" tIns="0" bIns="0">
+            <a:spAutoFit/>
+          </a:bodyPr>
+          <a:lstStyle/>
+          <a:p>
+            <a:pPr algn="l">
+              <a:lnSpc>
+                <a:spcPct val="135000"/>
+              </a:lnSpc>
+            </a:pPr>
+            <a:r>
+              <a:rPr sz="2400" b="0">
+                <a:solidFill>
+                  <a:srgbClr val="514149"/>
+                </a:solidFill>
+                <a:latin typeface="Apple SD Gothic Neo"/>
+              </a:rPr>
+              <a:t>세션 시간·화면·장비</a:t>
+            </a:r>
+          </a:p>
+          <a:p>
+            <a:pPr algn="l">
+              <a:lnSpc>
+                <a:spcPct val="135000"/>
+              </a:lnSpc>
+            </a:pPr>
+            <a:r>
+              <a:rPr sz="2400" b="0">
+                <a:solidFill>
+                  <a:srgbClr val="514149"/>
+                </a:solidFill>
+                <a:latin typeface="Apple SD Gothic Neo"/>
+              </a:rPr>
+              <a:t>운영 흐름</a:t>
+            </a:r>
+          </a:p>
+        </p:txBody>
+      </p:sp>
+      <p:sp>
+        <p:nvSpPr>
+          <p:cNvPr id="28" name="TextBox 27"/>
+          <p:cNvSpPr txBox="1"/>
+          <p:nvPr/>
+        </p:nvSpPr>
+        <p:spPr>
+          <a:xfrm>
+            <a:off x="975360" y="10561320"/>
+            <a:ext cx="22433280" cy="822960"/>
+          </a:xfrm>
+          <a:prstGeom prst="rect">
+            <a:avLst/>
+          </a:prstGeom>
+          <a:noFill/>
+        </p:spPr>
+        <p:txBody>
+          <a:bodyPr wrap="square" anchor="ctr" lIns="0" rIns="0" tIns="0" bIns="0">
+            <a:spAutoFit/>
+          </a:bodyPr>
+          <a:lstStyle/>
+          <a:p>
+            <a:pPr algn="ctr">
+              <a:lnSpc>
+                <a:spcPct val="125000"/>
+              </a:lnSpc>
+            </a:pPr>
+            <a:r>
+              <a:rPr sz="2600" b="1">
+                <a:solidFill>
+                  <a:srgbClr val="2A2A2A"/>
+                </a:solidFill>
+                <a:latin typeface="Apple SD Gothic Neo"/>
+              </a:rPr>
+              <a:t>기준이 정해진 뒤  </a:t>
+            </a:r>
+            <a:r>
+              <a:rPr sz="2600" b="0">
+                <a:solidFill>
+                  <a:srgbClr val="514149"/>
+                </a:solidFill>
+                <a:latin typeface="Apple SD Gothic Neo"/>
+              </a:rPr>
+              <a:t>신체진찰 소견 검수 · 전문가 독립 채점으로 AI 채점 비교 · 학생 파일럿 · 데이터 동의·보관 기준</a:t>
+            </a:r>
+          </a:p>
+        </p:txBody>
+      </p:sp>
+      <p:sp>
+        <p:nvSpPr>
+          <p:cNvPr id="29" name="TextBox 28"/>
+          <p:cNvSpPr txBox="1"/>
+          <p:nvPr/>
+        </p:nvSpPr>
+        <p:spPr>
+          <a:xfrm>
+            <a:off x="975360" y="11521440"/>
+            <a:ext cx="22433280" cy="685800"/>
+          </a:xfrm>
+          <a:prstGeom prst="rect">
+            <a:avLst/>
+          </a:prstGeom>
+          <a:noFill/>
+        </p:spPr>
+        <p:txBody>
+          <a:bodyPr wrap="square" anchor="t" lIns="0" rIns="0" tIns="0" bIns="0">
+            <a:spAutoFit/>
+          </a:bodyPr>
+          <a:lstStyle/>
+          <a:p>
+            <a:pPr algn="ctr">
+              <a:lnSpc>
+                <a:spcPct val="125000"/>
+              </a:lnSpc>
+            </a:pPr>
+            <a:r>
+              <a:rPr sz="2400" b="0">
+                <a:solidFill>
+                  <a:srgbClr val="7A7176"/>
+                </a:solidFill>
+                <a:latin typeface="Apple SD Gothic Neo"/>
+              </a:rPr>
+              <a:t>표본 수와 일정은 센터 기준에 맞춥니다</a:t>
             </a:r>
           </a:p>
         </p:txBody>
